--- a/public/fun/pack/pptx/family/가족소개_26_우리부부_코스모스신작로.pptx
+++ b/public/fun/pack/pptx/family/가족소개_26_우리부부_코스모스신작로.pptx
@@ -3286,6 +3286,14 @@
 <file path=ppt/slides/slide1.xml><?xml version="1.0" encoding="utf-8"?>
 <p:sld xmlns:a="http://schemas.openxmlformats.org/drawingml/2006/main" xmlns:p="http://schemas.openxmlformats.org/presentationml/2006/main" xmlns:r="http://schemas.openxmlformats.org/officeDocument/2006/relationships">
   <p:cSld>
+    <p:bg>
+      <p:bgPr>
+        <a:solidFill>
+          <a:srgbClr val="FBECF6"/>
+        </a:solidFill>
+        <a:effectLst/>
+      </p:bgPr>
+    </p:bg>
     <p:spTree>
       <p:nvGrpSpPr>
         <p:cNvPr id="1" name=""/>
@@ -3293,30 +3301,119 @@
         <p:nvPr/>
       </p:nvGrpSpPr>
       <p:grpSpPr/>
-      <p:pic>
-        <p:nvPicPr>
-          <p:cNvPr id="3" name="표지 그림" descr="family-26.jpg"/>
-          <p:cNvPicPr>
-            <a:picLocks noChangeAspect="1"/>
-          </p:cNvPicPr>
-          <p:nvPr/>
-        </p:nvPicPr>
-        <p:blipFill>
-          <a:blip r:embed="rId2"/>
-          <a:stretch>
-            <a:fillRect/>
-          </a:stretch>
-        </p:blipFill>
-        <p:spPr>
-          <a:xfrm>
-            <a:off x="0" y="0"/>
-            <a:ext cx="12191695" cy="6858000"/>
+      <p:sp>
+        <p:nvSpPr>
+          <p:cNvPr id="3" name="사진 자리"/>
+          <p:cNvSpPr/>
+          <p:nvPr/>
+        </p:nvSpPr>
+        <p:spPr>
+          <a:xfrm>
+            <a:off x="7558851" y="685800"/>
+            <a:ext cx="3169840" cy="5486400"/>
+          </a:xfrm>
+          <a:prstGeom prst="round2SameRect">
+            <a:avLst>
+              <a:gd name="adj1" fmla="val 50000"/>
+              <a:gd name="adj2" fmla="val 0"/>
+            </a:avLst>
+          </a:prstGeom>
+          <a:solidFill>
+            <a:srgbClr val="EBADD6"/>
+          </a:solidFill>
+          <a:ln>
+            <a:noFill/>
+          </a:ln>
+        </p:spPr>
+        <p:txBody>
+          <a:bodyPr rtlCol="0" anchor="ctr" wrap="square" lIns="54864" rIns="54864" tIns="27432" bIns="27432">
+            <a:noAutofit/>
+          </a:bodyPr>
+          <a:lstStyle/>
+          <a:p>
+            <a:pPr algn="ctr">
+              <a:lnSpc>
+                <a:spcPct val="100000"/>
+              </a:lnSpc>
+            </a:pPr>
+            <a:r>
+              <a:rPr sz="1400" b="0" i="0">
+                <a:solidFill>
+                  <a:srgbClr val="49273E"/>
+                </a:solidFill>
+              </a:rPr>
+              <a:t>사진을 넣어 주세요</a:t>
+            </a:r>
+          </a:p>
+        </p:txBody>
+      </p:sp>
+      <p:sp>
+        <p:nvSpPr>
+          <p:cNvPr id="4" name="장식"/>
+          <p:cNvSpPr/>
+          <p:nvPr/>
+        </p:nvSpPr>
+        <p:spPr>
+          <a:xfrm>
+            <a:off x="6827349" y="4251960"/>
+            <a:ext cx="1005840" cy="1005840"/>
+          </a:xfrm>
+          <a:prstGeom prst="ellipse">
+            <a:avLst/>
+          </a:prstGeom>
+          <a:solidFill>
+            <a:srgbClr val="EBADD6"/>
+          </a:solidFill>
+          <a:ln>
+            <a:noFill/>
+          </a:ln>
+        </p:spPr>
+        <p:txBody>
+          <a:bodyPr rtlCol="0" anchor="ctr"/>
+          <a:lstStyle/>
+          <a:p>
+            <a:pPr algn="ctr"/>
+          </a:p>
+        </p:txBody>
+      </p:sp>
+      <p:sp>
+        <p:nvSpPr>
+          <p:cNvPr id="5" name="라벨"/>
+          <p:cNvSpPr txBox="1"/>
+          <p:nvPr/>
+        </p:nvSpPr>
+        <p:spPr>
+          <a:xfrm>
+            <a:off x="822960" y="2148840"/>
+            <a:ext cx="5608179" cy="274320"/>
           </a:xfrm>
           <a:prstGeom prst="rect">
             <a:avLst/>
           </a:prstGeom>
-        </p:spPr>
-      </p:pic>
+          <a:noFill/>
+        </p:spPr>
+        <p:txBody>
+          <a:bodyPr wrap="square" lIns="54864" rIns="54864" tIns="27432" bIns="27432" anchor="t">
+            <a:noAutofit/>
+          </a:bodyPr>
+          <a:lstStyle/>
+          <a:p>
+            <a:pPr algn="l">
+              <a:lnSpc>
+                <a:spcPct val="115000"/>
+              </a:lnSpc>
+            </a:pPr>
+            <a:r>
+              <a:rPr sz="1000" b="1" i="0" spc="250">
+                <a:solidFill>
+                  <a:srgbClr val="26231F"/>
+                </a:solidFill>
+              </a:rPr>
+              <a:t>FAMILY ALBUM</a:t>
+            </a:r>
+          </a:p>
+        </p:txBody>
+      </p:sp>
       <p:sp>
         <p:nvSpPr>
           <p:cNvPr id="2" name="Title 1"/>
@@ -3329,8 +3426,8 @@
         </p:nvSpPr>
         <p:spPr>
           <a:xfrm>
-            <a:off x="853418" y="2057400"/>
-            <a:ext cx="6095847" cy="1554480"/>
+            <a:off x="822960" y="2606040"/>
+            <a:ext cx="5608179" cy="1188720"/>
           </a:xfrm>
         </p:spPr>
         <p:txBody>
@@ -3345,9 +3442,9 @@
               </a:lnSpc>
             </a:pPr>
             <a:r>
-              <a:rPr sz="3600" b="1" i="0">
-                <a:solidFill>
-                  <a:srgbClr val="85326A"/>
+              <a:rPr sz="4000" b="1" i="0">
+                <a:solidFill>
+                  <a:srgbClr val="26231F"/>
                 </a:solidFill>
               </a:rPr>
               <a:t>우리 가족을 소개합니다</a:t>
@@ -3357,14 +3454,14 @@
       </p:sp>
       <p:sp>
         <p:nvSpPr>
-          <p:cNvPr id="4" name="한 줄 문구"/>
+          <p:cNvPr id="6" name="한 줄 문구"/>
           <p:cNvSpPr txBox="1"/>
           <p:nvPr/>
         </p:nvSpPr>
         <p:spPr>
           <a:xfrm>
-            <a:off x="853418" y="3749039"/>
-            <a:ext cx="6095847" cy="822960"/>
+            <a:off x="822960" y="3886200"/>
+            <a:ext cx="5608179" cy="822960"/>
           </a:xfrm>
           <a:prstGeom prst="rect">
             <a:avLst/>
@@ -3383,9 +3480,9 @@
               </a:lnSpc>
             </a:pPr>
             <a:r>
-              <a:rPr sz="1700" b="0" i="1">
-                <a:solidFill>
-                  <a:srgbClr val="85326A"/>
+              <a:rPr sz="1700" b="0" i="0">
+                <a:solidFill>
+                  <a:srgbClr val="26231F"/>
                 </a:solidFill>
               </a:rPr>
               <a:t>코스모스 신작로를 걷던 오후</a:t>
@@ -3395,14 +3492,14 @@
       </p:sp>
       <p:sp>
         <p:nvSpPr>
-          <p:cNvPr id="5" name="안내 문구"/>
+          <p:cNvPr id="7" name="안내 문구"/>
           <p:cNvSpPr txBox="1"/>
           <p:nvPr/>
         </p:nvSpPr>
         <p:spPr>
           <a:xfrm>
-            <a:off x="853418" y="4617720"/>
-            <a:ext cx="6095847" cy="914400"/>
+            <a:off x="822960" y="4754880"/>
+            <a:ext cx="5608179" cy="914400"/>
           </a:xfrm>
           <a:prstGeom prst="rect">
             <a:avLst/>
@@ -3423,10 +3520,10 @@
             <a:r>
               <a:rPr sz="1400" b="0" i="0">
                 <a:solidFill>
-                  <a:srgbClr val="666666"/>
+                  <a:srgbClr val="26231F"/>
                 </a:solidFill>
               </a:rPr>
-              <a:t>우리 부부 · 2027. 00. 00</a:t>
+              <a:t>우리 부부 · 날짜 입력</a:t>
             </a:r>
           </a:p>
         </p:txBody>
@@ -3445,7 +3542,7 @@
     <p:bg>
       <p:bgPr>
         <a:solidFill>
-          <a:srgbClr val="F9F0F6"/>
+          <a:srgbClr val="FBECF6"/>
         </a:solidFill>
         <a:effectLst/>
       </p:bgPr>
@@ -3465,14 +3562,14 @@
         </p:nvSpPr>
         <p:spPr>
           <a:xfrm>
-            <a:off x="0" y="6035040"/>
-            <a:ext cx="1737360" cy="822960"/>
-          </a:xfrm>
-          <a:prstGeom prst="rtTriangle">
+            <a:off x="640080" y="6400800"/>
+            <a:ext cx="10911535" cy="10972"/>
+          </a:xfrm>
+          <a:prstGeom prst="rect">
             <a:avLst/>
           </a:prstGeom>
           <a:solidFill>
-            <a:srgbClr val="F0D1E5"/>
+            <a:srgbClr val="26231F"/>
           </a:solidFill>
           <a:ln>
             <a:noFill/>
@@ -3488,20 +3585,58 @@
       </p:sp>
       <p:sp>
         <p:nvSpPr>
-          <p:cNvPr id="4" name="장식"/>
+          <p:cNvPr id="4" name="하단 라벨"/>
+          <p:cNvSpPr txBox="1"/>
+          <p:nvPr/>
+        </p:nvSpPr>
+        <p:spPr>
+          <a:xfrm>
+            <a:off x="640080" y="6437376"/>
+            <a:ext cx="5486400" cy="274320"/>
+          </a:xfrm>
+          <a:prstGeom prst="rect">
+            <a:avLst/>
+          </a:prstGeom>
+          <a:noFill/>
+        </p:spPr>
+        <p:txBody>
+          <a:bodyPr wrap="square" lIns="54864" rIns="54864" tIns="27432" bIns="27432" anchor="ctr">
+            <a:noAutofit/>
+          </a:bodyPr>
+          <a:lstStyle/>
+          <a:p>
+            <a:pPr algn="l">
+              <a:lnSpc>
+                <a:spcPct val="115000"/>
+              </a:lnSpc>
+            </a:pPr>
+            <a:r>
+              <a:rPr sz="900" b="1" i="0" spc="250">
+                <a:solidFill>
+                  <a:srgbClr val="26231F"/>
+                </a:solidFill>
+              </a:rPr>
+              <a:t>FAMILY ALBUM</a:t>
+            </a:r>
+          </a:p>
+        </p:txBody>
+      </p:sp>
+      <p:sp>
+        <p:nvSpPr>
+          <p:cNvPr id="5" name="포인트"/>
           <p:cNvSpPr/>
           <p:nvPr/>
         </p:nvSpPr>
         <p:spPr>
           <a:xfrm>
-            <a:off x="0" y="6400800"/>
-            <a:ext cx="914400" cy="457200"/>
-          </a:xfrm>
-          <a:prstGeom prst="rtTriangle">
+            <a:off x="11213287" y="6473952"/>
+            <a:ext cx="219456" cy="219456"/>
+          </a:xfrm>
+          <a:prstGeom prst="donut">
             <a:avLst/>
           </a:prstGeom>
           <a:solidFill>
-            <a:srgbClr val="C15CA0"/>
+            <a:srgbClr val="D879B8"/>
           </a:solidFill>
           <a:ln>
             <a:noFill/>
@@ -3527,8 +3662,8 @@
         </p:nvSpPr>
         <p:spPr>
           <a:xfrm>
-            <a:off x="640080" y="457200"/>
-            <a:ext cx="9722815" cy="868680"/>
+            <a:off x="640080" y="502920"/>
+            <a:ext cx="10911535" cy="914400"/>
           </a:xfrm>
         </p:spPr>
         <p:txBody>
@@ -3545,7 +3680,7 @@
             <a:r>
               <a:rPr sz="3000" b="1" i="0">
                 <a:solidFill>
-                  <a:srgbClr val="85326A"/>
+                  <a:srgbClr val="26231F"/>
                 </a:solidFill>
               </a:rPr>
               <a:t>가족 구성원</a:t>
@@ -3555,25 +3690,23 @@
       </p:sp>
       <p:sp>
         <p:nvSpPr>
-          <p:cNvPr id="5" name="사진 자리"/>
+          <p:cNvPr id="6" name="사진 자리"/>
           <p:cNvSpPr/>
           <p:nvPr/>
         </p:nvSpPr>
         <p:spPr>
           <a:xfrm>
-            <a:off x="2110663" y="1600200"/>
-            <a:ext cx="2400300" cy="2400300"/>
+            <a:off x="2167813" y="1600200"/>
+            <a:ext cx="2286000" cy="2286000"/>
           </a:xfrm>
           <a:prstGeom prst="ellipse">
             <a:avLst/>
           </a:prstGeom>
           <a:solidFill>
-            <a:srgbClr val="F0D1E5"/>
+            <a:srgbClr val="F6D5EB"/>
           </a:solidFill>
           <a:ln w="19050">
-            <a:solidFill>
-              <a:srgbClr val="C15CA0"/>
-            </a:solidFill>
+            <a:noFill/>
             <a:prstDash val="dash"/>
           </a:ln>
         </p:spPr>
@@ -3591,7 +3724,7 @@
             <a:r>
               <a:rPr sz="1200" b="0" i="0">
                 <a:solidFill>
-                  <a:srgbClr val="85326A"/>
+                  <a:srgbClr val="8E8780"/>
                 </a:solidFill>
               </a:rPr>
               <a:t>사진</a:t>
@@ -3601,13 +3734,13 @@
       </p:sp>
       <p:sp>
         <p:nvSpPr>
-          <p:cNvPr id="6" name="TextBox 5"/>
+          <p:cNvPr id="7" name="TextBox 6"/>
           <p:cNvSpPr txBox="1"/>
           <p:nvPr/>
         </p:nvSpPr>
         <p:spPr>
           <a:xfrm>
-            <a:off x="640080" y="4091939"/>
+            <a:off x="640080" y="3977639"/>
             <a:ext cx="5341467" cy="411480"/>
           </a:xfrm>
           <a:prstGeom prst="rect">
@@ -3629,7 +3762,7 @@
             <a:r>
               <a:rPr sz="1600" b="1" i="0">
                 <a:solidFill>
-                  <a:srgbClr val="85326A"/>
+                  <a:srgbClr val="49273E"/>
                 </a:solidFill>
               </a:rPr>
               <a:t>남편</a:t>
@@ -3639,14 +3772,14 @@
       </p:sp>
       <p:sp>
         <p:nvSpPr>
-          <p:cNvPr id="7" name="TextBox 6"/>
+          <p:cNvPr id="8" name="TextBox 7"/>
           <p:cNvSpPr txBox="1"/>
           <p:nvPr/>
         </p:nvSpPr>
         <p:spPr>
           <a:xfrm>
-            <a:off x="731519" y="4549140"/>
-            <a:ext cx="5158587" cy="1851660"/>
+            <a:off x="731519" y="4434840"/>
+            <a:ext cx="5158587" cy="1737360"/>
           </a:xfrm>
           <a:prstGeom prst="rect">
             <a:avLst/>
@@ -3707,25 +3840,23 @@
       </p:sp>
       <p:sp>
         <p:nvSpPr>
-          <p:cNvPr id="8" name="사진 자리"/>
+          <p:cNvPr id="9" name="사진 자리"/>
           <p:cNvSpPr/>
           <p:nvPr/>
         </p:nvSpPr>
         <p:spPr>
           <a:xfrm>
-            <a:off x="7680731" y="1600200"/>
-            <a:ext cx="2400300" cy="2400300"/>
+            <a:off x="7737881" y="1600200"/>
+            <a:ext cx="2286000" cy="2286000"/>
           </a:xfrm>
           <a:prstGeom prst="ellipse">
             <a:avLst/>
           </a:prstGeom>
           <a:solidFill>
-            <a:srgbClr val="F0D1E5"/>
+            <a:srgbClr val="F6D5EB"/>
           </a:solidFill>
           <a:ln w="19050">
-            <a:solidFill>
-              <a:srgbClr val="C15CA0"/>
-            </a:solidFill>
+            <a:noFill/>
             <a:prstDash val="dash"/>
           </a:ln>
         </p:spPr>
@@ -3743,7 +3874,7 @@
             <a:r>
               <a:rPr sz="1200" b="0" i="0">
                 <a:solidFill>
-                  <a:srgbClr val="85326A"/>
+                  <a:srgbClr val="8E8780"/>
                 </a:solidFill>
               </a:rPr>
               <a:t>사진</a:t>
@@ -3753,13 +3884,13 @@
       </p:sp>
       <p:sp>
         <p:nvSpPr>
-          <p:cNvPr id="9" name="TextBox 8"/>
+          <p:cNvPr id="10" name="TextBox 9"/>
           <p:cNvSpPr txBox="1"/>
           <p:nvPr/>
         </p:nvSpPr>
         <p:spPr>
           <a:xfrm>
-            <a:off x="6210147" y="4091939"/>
+            <a:off x="6210147" y="3977639"/>
             <a:ext cx="5341467" cy="411480"/>
           </a:xfrm>
           <a:prstGeom prst="rect">
@@ -3781,7 +3912,7 @@
             <a:r>
               <a:rPr sz="1600" b="1" i="0">
                 <a:solidFill>
-                  <a:srgbClr val="85326A"/>
+                  <a:srgbClr val="49273E"/>
                 </a:solidFill>
               </a:rPr>
               <a:t>아내</a:t>
@@ -3791,14 +3922,14 @@
       </p:sp>
       <p:sp>
         <p:nvSpPr>
-          <p:cNvPr id="10" name="TextBox 9"/>
+          <p:cNvPr id="11" name="TextBox 10"/>
           <p:cNvSpPr txBox="1"/>
           <p:nvPr/>
         </p:nvSpPr>
         <p:spPr>
           <a:xfrm>
-            <a:off x="6301587" y="4549140"/>
-            <a:ext cx="5158587" cy="1851660"/>
+            <a:off x="6301587" y="4434840"/>
+            <a:ext cx="5158587" cy="1737360"/>
           </a:xfrm>
           <a:prstGeom prst="rect">
             <a:avLst/>
@@ -3871,7 +4002,7 @@
     <p:bg>
       <p:bgPr>
         <a:solidFill>
-          <a:srgbClr val="F9F0F6"/>
+          <a:srgbClr val="FBECF6"/>
         </a:solidFill>
         <a:effectLst/>
       </p:bgPr>
@@ -3891,14 +4022,14 @@
         </p:nvSpPr>
         <p:spPr>
           <a:xfrm>
-            <a:off x="0" y="6035040"/>
-            <a:ext cx="1737360" cy="822960"/>
-          </a:xfrm>
-          <a:prstGeom prst="rtTriangle">
+            <a:off x="640080" y="6400800"/>
+            <a:ext cx="10911535" cy="10972"/>
+          </a:xfrm>
+          <a:prstGeom prst="rect">
             <a:avLst/>
           </a:prstGeom>
           <a:solidFill>
-            <a:srgbClr val="F0D1E5"/>
+            <a:srgbClr val="26231F"/>
           </a:solidFill>
           <a:ln>
             <a:noFill/>
@@ -3914,20 +4045,58 @@
       </p:sp>
       <p:sp>
         <p:nvSpPr>
-          <p:cNvPr id="4" name="장식"/>
+          <p:cNvPr id="4" name="하단 라벨"/>
+          <p:cNvSpPr txBox="1"/>
+          <p:nvPr/>
+        </p:nvSpPr>
+        <p:spPr>
+          <a:xfrm>
+            <a:off x="640080" y="6437376"/>
+            <a:ext cx="5486400" cy="274320"/>
+          </a:xfrm>
+          <a:prstGeom prst="rect">
+            <a:avLst/>
+          </a:prstGeom>
+          <a:noFill/>
+        </p:spPr>
+        <p:txBody>
+          <a:bodyPr wrap="square" lIns="54864" rIns="54864" tIns="27432" bIns="27432" anchor="ctr">
+            <a:noAutofit/>
+          </a:bodyPr>
+          <a:lstStyle/>
+          <a:p>
+            <a:pPr algn="l">
+              <a:lnSpc>
+                <a:spcPct val="115000"/>
+              </a:lnSpc>
+            </a:pPr>
+            <a:r>
+              <a:rPr sz="900" b="1" i="0" spc="250">
+                <a:solidFill>
+                  <a:srgbClr val="26231F"/>
+                </a:solidFill>
+              </a:rPr>
+              <a:t>FAMILY ALBUM</a:t>
+            </a:r>
+          </a:p>
+        </p:txBody>
+      </p:sp>
+      <p:sp>
+        <p:nvSpPr>
+          <p:cNvPr id="5" name="포인트"/>
           <p:cNvSpPr/>
           <p:nvPr/>
         </p:nvSpPr>
         <p:spPr>
           <a:xfrm>
-            <a:off x="0" y="6400800"/>
-            <a:ext cx="914400" cy="457200"/>
-          </a:xfrm>
-          <a:prstGeom prst="rtTriangle">
+            <a:off x="11213287" y="6473952"/>
+            <a:ext cx="219456" cy="219456"/>
+          </a:xfrm>
+          <a:prstGeom prst="donut">
             <a:avLst/>
           </a:prstGeom>
           <a:solidFill>
-            <a:srgbClr val="C15CA0"/>
+            <a:srgbClr val="D879B8"/>
           </a:solidFill>
           <a:ln>
             <a:noFill/>
@@ -3953,8 +4122,8 @@
         </p:nvSpPr>
         <p:spPr>
           <a:xfrm>
-            <a:off x="640080" y="457200"/>
-            <a:ext cx="9722815" cy="868680"/>
+            <a:off x="640080" y="502920"/>
+            <a:ext cx="10911535" cy="914400"/>
           </a:xfrm>
         </p:spPr>
         <p:txBody>
@@ -3971,7 +4140,7 @@
             <a:r>
               <a:rPr sz="3000" b="1" i="0">
                 <a:solidFill>
-                  <a:srgbClr val="85326A"/>
+                  <a:srgbClr val="26231F"/>
                 </a:solidFill>
               </a:rPr>
               <a:t>우리 가족 이야기</a:t>
@@ -3981,7 +4150,7 @@
       </p:sp>
       <p:sp>
         <p:nvSpPr>
-          <p:cNvPr id="5" name="타임라인 선"/>
+          <p:cNvPr id="6" name="타임라인 선"/>
           <p:cNvSpPr/>
           <p:nvPr/>
         </p:nvSpPr>
@@ -3994,7 +4163,7 @@
             <a:avLst/>
           </a:prstGeom>
           <a:solidFill>
-            <a:srgbClr val="F0D1E5"/>
+            <a:srgbClr val="F6D5EB"/>
           </a:solidFill>
           <a:ln>
             <a:noFill/>
@@ -4010,7 +4179,7 @@
       </p:sp>
       <p:sp>
         <p:nvSpPr>
-          <p:cNvPr id="6" name="때 1"/>
+          <p:cNvPr id="7" name="때 1"/>
           <p:cNvSpPr/>
           <p:nvPr/>
         </p:nvSpPr>
@@ -4023,7 +4192,7 @@
             <a:avLst/>
           </a:prstGeom>
           <a:solidFill>
-            <a:srgbClr val="C15CA0"/>
+            <a:srgbClr val="D879B8"/>
           </a:solidFill>
           <a:ln w="38100">
             <a:solidFill>
@@ -4041,7 +4210,7 @@
       </p:sp>
       <p:sp>
         <p:nvSpPr>
-          <p:cNvPr id="7" name="TextBox 6"/>
+          <p:cNvPr id="8" name="TextBox 7"/>
           <p:cNvSpPr txBox="1"/>
           <p:nvPr/>
         </p:nvSpPr>
@@ -4069,7 +4238,7 @@
             <a:r>
               <a:rPr sz="1600" b="1" i="0">
                 <a:solidFill>
-                  <a:srgbClr val="C15CA0"/>
+                  <a:srgbClr val="D879B8"/>
                 </a:solidFill>
               </a:rPr>
               <a:t>처음 만난 날</a:t>
@@ -4079,7 +4248,7 @@
       </p:sp>
       <p:sp>
         <p:nvSpPr>
-          <p:cNvPr id="8" name="TextBox 7"/>
+          <p:cNvPr id="9" name="TextBox 8"/>
           <p:cNvSpPr txBox="1"/>
           <p:nvPr/>
         </p:nvSpPr>
@@ -4107,7 +4276,7 @@
             <a:r>
               <a:rPr sz="1800" b="1" i="0">
                 <a:solidFill>
-                  <a:srgbClr val="85326A"/>
+                  <a:srgbClr val="49273E"/>
                 </a:solidFill>
               </a:rPr>
               <a:t>첫 만남</a:t>
@@ -4117,7 +4286,7 @@
       </p:sp>
       <p:sp>
         <p:nvSpPr>
-          <p:cNvPr id="9" name="TextBox 8"/>
+          <p:cNvPr id="10" name="TextBox 9"/>
           <p:cNvSpPr txBox="1"/>
           <p:nvPr/>
         </p:nvSpPr>
@@ -4145,7 +4314,7 @@
             <a:r>
               <a:rPr sz="1500" b="0" i="0">
                 <a:solidFill>
-                  <a:srgbClr val="2B2B2B"/>
+                  <a:srgbClr val="26231F"/>
                 </a:solidFill>
               </a:rPr>
               <a:t>어디에서 어떻게 만났나요?</a:t>
@@ -4155,7 +4324,7 @@
       </p:sp>
       <p:sp>
         <p:nvSpPr>
-          <p:cNvPr id="10" name="때 2"/>
+          <p:cNvPr id="11" name="때 2"/>
           <p:cNvSpPr/>
           <p:nvPr/>
         </p:nvSpPr>
@@ -4168,7 +4337,7 @@
             <a:avLst/>
           </a:prstGeom>
           <a:solidFill>
-            <a:srgbClr val="C15CA0"/>
+            <a:srgbClr val="D879B8"/>
           </a:solidFill>
           <a:ln w="38100">
             <a:solidFill>
@@ -4186,7 +4355,7 @@
       </p:sp>
       <p:sp>
         <p:nvSpPr>
-          <p:cNvPr id="11" name="TextBox 10"/>
+          <p:cNvPr id="12" name="TextBox 11"/>
           <p:cNvSpPr txBox="1"/>
           <p:nvPr/>
         </p:nvSpPr>
@@ -4214,7 +4383,7 @@
             <a:r>
               <a:rPr sz="1600" b="1" i="0">
                 <a:solidFill>
-                  <a:srgbClr val="C15CA0"/>
+                  <a:srgbClr val="D879B8"/>
                 </a:solidFill>
               </a:rPr>
               <a:t>결혼</a:t>
@@ -4224,7 +4393,7 @@
       </p:sp>
       <p:sp>
         <p:nvSpPr>
-          <p:cNvPr id="12" name="TextBox 11"/>
+          <p:cNvPr id="13" name="TextBox 12"/>
           <p:cNvSpPr txBox="1"/>
           <p:nvPr/>
         </p:nvSpPr>
@@ -4252,7 +4421,7 @@
             <a:r>
               <a:rPr sz="1800" b="1" i="0">
                 <a:solidFill>
-                  <a:srgbClr val="85326A"/>
+                  <a:srgbClr val="49273E"/>
                 </a:solidFill>
               </a:rPr>
               <a:t>함께 시작한 날</a:t>
@@ -4262,7 +4431,7 @@
       </p:sp>
       <p:sp>
         <p:nvSpPr>
-          <p:cNvPr id="13" name="TextBox 12"/>
+          <p:cNvPr id="14" name="TextBox 13"/>
           <p:cNvSpPr txBox="1"/>
           <p:nvPr/>
         </p:nvSpPr>
@@ -4290,7 +4459,7 @@
             <a:r>
               <a:rPr sz="1500" b="0" i="0">
                 <a:solidFill>
-                  <a:srgbClr val="2B2B2B"/>
+                  <a:srgbClr val="26231F"/>
                 </a:solidFill>
               </a:rPr>
               <a:t>그날의 기억을 적어요</a:t>
@@ -4300,7 +4469,7 @@
       </p:sp>
       <p:sp>
         <p:nvSpPr>
-          <p:cNvPr id="14" name="때 3"/>
+          <p:cNvPr id="15" name="때 3"/>
           <p:cNvSpPr/>
           <p:nvPr/>
         </p:nvSpPr>
@@ -4313,7 +4482,7 @@
             <a:avLst/>
           </a:prstGeom>
           <a:solidFill>
-            <a:srgbClr val="C15CA0"/>
+            <a:srgbClr val="D879B8"/>
           </a:solidFill>
           <a:ln w="38100">
             <a:solidFill>
@@ -4331,7 +4500,7 @@
       </p:sp>
       <p:sp>
         <p:nvSpPr>
-          <p:cNvPr id="15" name="TextBox 14"/>
+          <p:cNvPr id="16" name="TextBox 15"/>
           <p:cNvSpPr txBox="1"/>
           <p:nvPr/>
         </p:nvSpPr>
@@ -4359,7 +4528,7 @@
             <a:r>
               <a:rPr sz="1600" b="1" i="0">
                 <a:solidFill>
-                  <a:srgbClr val="C15CA0"/>
+                  <a:srgbClr val="D879B8"/>
                 </a:solidFill>
               </a:rPr>
               <a:t>첫 집</a:t>
@@ -4369,7 +4538,7 @@
       </p:sp>
       <p:sp>
         <p:nvSpPr>
-          <p:cNvPr id="16" name="TextBox 15"/>
+          <p:cNvPr id="17" name="TextBox 16"/>
           <p:cNvSpPr txBox="1"/>
           <p:nvPr/>
         </p:nvSpPr>
@@ -4397,7 +4566,7 @@
             <a:r>
               <a:rPr sz="1800" b="1" i="0">
                 <a:solidFill>
-                  <a:srgbClr val="85326A"/>
+                  <a:srgbClr val="49273E"/>
                 </a:solidFill>
               </a:rPr>
               <a:t>우리의 보금자리</a:t>
@@ -4407,7 +4576,7 @@
       </p:sp>
       <p:sp>
         <p:nvSpPr>
-          <p:cNvPr id="17" name="TextBox 16"/>
+          <p:cNvPr id="18" name="TextBox 17"/>
           <p:cNvSpPr txBox="1"/>
           <p:nvPr/>
         </p:nvSpPr>
@@ -4435,7 +4604,7 @@
             <a:r>
               <a:rPr sz="1500" b="0" i="0">
                 <a:solidFill>
-                  <a:srgbClr val="2B2B2B"/>
+                  <a:srgbClr val="26231F"/>
                 </a:solidFill>
               </a:rPr>
               <a:t>처음 이사한 날</a:t>
@@ -4445,7 +4614,7 @@
       </p:sp>
       <p:sp>
         <p:nvSpPr>
-          <p:cNvPr id="18" name="때 4"/>
+          <p:cNvPr id="19" name="때 4"/>
           <p:cNvSpPr/>
           <p:nvPr/>
         </p:nvSpPr>
@@ -4458,7 +4627,7 @@
             <a:avLst/>
           </a:prstGeom>
           <a:solidFill>
-            <a:srgbClr val="C15CA0"/>
+            <a:srgbClr val="D879B8"/>
           </a:solidFill>
           <a:ln w="38100">
             <a:solidFill>
@@ -4476,7 +4645,7 @@
       </p:sp>
       <p:sp>
         <p:nvSpPr>
-          <p:cNvPr id="19" name="TextBox 18"/>
+          <p:cNvPr id="20" name="TextBox 19"/>
           <p:cNvSpPr txBox="1"/>
           <p:nvPr/>
         </p:nvSpPr>
@@ -4504,7 +4673,7 @@
             <a:r>
               <a:rPr sz="1600" b="1" i="0">
                 <a:solidFill>
-                  <a:srgbClr val="C15CA0"/>
+                  <a:srgbClr val="D879B8"/>
                 </a:solidFill>
               </a:rPr>
               <a:t>지금</a:t>
@@ -4514,7 +4683,7 @@
       </p:sp>
       <p:sp>
         <p:nvSpPr>
-          <p:cNvPr id="20" name="TextBox 19"/>
+          <p:cNvPr id="21" name="TextBox 20"/>
           <p:cNvSpPr txBox="1"/>
           <p:nvPr/>
         </p:nvSpPr>
@@ -4542,7 +4711,7 @@
             <a:r>
               <a:rPr sz="1800" b="1" i="0">
                 <a:solidFill>
-                  <a:srgbClr val="85326A"/>
+                  <a:srgbClr val="49273E"/>
                 </a:solidFill>
               </a:rPr>
               <a:t>오늘의 우리</a:t>
@@ -4552,7 +4721,7 @@
       </p:sp>
       <p:sp>
         <p:nvSpPr>
-          <p:cNvPr id="21" name="TextBox 20"/>
+          <p:cNvPr id="22" name="TextBox 21"/>
           <p:cNvSpPr txBox="1"/>
           <p:nvPr/>
         </p:nvSpPr>
@@ -4580,7 +4749,7 @@
             <a:r>
               <a:rPr sz="1500" b="0" i="0">
                 <a:solidFill>
-                  <a:srgbClr val="2B2B2B"/>
+                  <a:srgbClr val="26231F"/>
                 </a:solidFill>
               </a:rPr>
               <a:t>요즘 우리 이야기</a:t>
@@ -4602,7 +4771,7 @@
     <p:bg>
       <p:bgPr>
         <a:solidFill>
-          <a:srgbClr val="F9F0F6"/>
+          <a:srgbClr val="FBECF6"/>
         </a:solidFill>
         <a:effectLst/>
       </p:bgPr>
@@ -4622,14 +4791,14 @@
         </p:nvSpPr>
         <p:spPr>
           <a:xfrm>
-            <a:off x="0" y="6035040"/>
-            <a:ext cx="1737360" cy="822960"/>
-          </a:xfrm>
-          <a:prstGeom prst="rtTriangle">
+            <a:off x="640080" y="6400800"/>
+            <a:ext cx="10911535" cy="10972"/>
+          </a:xfrm>
+          <a:prstGeom prst="rect">
             <a:avLst/>
           </a:prstGeom>
           <a:solidFill>
-            <a:srgbClr val="F0D1E5"/>
+            <a:srgbClr val="26231F"/>
           </a:solidFill>
           <a:ln>
             <a:noFill/>
@@ -4645,20 +4814,58 @@
       </p:sp>
       <p:sp>
         <p:nvSpPr>
-          <p:cNvPr id="4" name="장식"/>
+          <p:cNvPr id="4" name="하단 라벨"/>
+          <p:cNvSpPr txBox="1"/>
+          <p:nvPr/>
+        </p:nvSpPr>
+        <p:spPr>
+          <a:xfrm>
+            <a:off x="640080" y="6437376"/>
+            <a:ext cx="5486400" cy="274320"/>
+          </a:xfrm>
+          <a:prstGeom prst="rect">
+            <a:avLst/>
+          </a:prstGeom>
+          <a:noFill/>
+        </p:spPr>
+        <p:txBody>
+          <a:bodyPr wrap="square" lIns="54864" rIns="54864" tIns="27432" bIns="27432" anchor="ctr">
+            <a:noAutofit/>
+          </a:bodyPr>
+          <a:lstStyle/>
+          <a:p>
+            <a:pPr algn="l">
+              <a:lnSpc>
+                <a:spcPct val="115000"/>
+              </a:lnSpc>
+            </a:pPr>
+            <a:r>
+              <a:rPr sz="900" b="1" i="0" spc="250">
+                <a:solidFill>
+                  <a:srgbClr val="26231F"/>
+                </a:solidFill>
+              </a:rPr>
+              <a:t>FAMILY ALBUM</a:t>
+            </a:r>
+          </a:p>
+        </p:txBody>
+      </p:sp>
+      <p:sp>
+        <p:nvSpPr>
+          <p:cNvPr id="5" name="포인트"/>
           <p:cNvSpPr/>
           <p:nvPr/>
         </p:nvSpPr>
         <p:spPr>
           <a:xfrm>
-            <a:off x="0" y="6400800"/>
-            <a:ext cx="914400" cy="457200"/>
-          </a:xfrm>
-          <a:prstGeom prst="rtTriangle">
+            <a:off x="11213287" y="6473952"/>
+            <a:ext cx="219456" cy="219456"/>
+          </a:xfrm>
+          <a:prstGeom prst="donut">
             <a:avLst/>
           </a:prstGeom>
           <a:solidFill>
-            <a:srgbClr val="C15CA0"/>
+            <a:srgbClr val="D879B8"/>
           </a:solidFill>
           <a:ln>
             <a:noFill/>
@@ -4684,8 +4891,8 @@
         </p:nvSpPr>
         <p:spPr>
           <a:xfrm>
-            <a:off x="640080" y="457200"/>
-            <a:ext cx="9722815" cy="868680"/>
+            <a:off x="640080" y="502920"/>
+            <a:ext cx="10911535" cy="914400"/>
           </a:xfrm>
         </p:spPr>
         <p:txBody>
@@ -4702,7 +4909,7 @@
             <a:r>
               <a:rPr sz="3000" b="1" i="0">
                 <a:solidFill>
-                  <a:srgbClr val="85326A"/>
+                  <a:srgbClr val="26231F"/>
                 </a:solidFill>
               </a:rPr>
               <a:t>우리 가족의 약속</a:t>
@@ -4712,7 +4919,7 @@
       </p:sp>
       <p:sp>
         <p:nvSpPr>
-          <p:cNvPr id="5" name="줄 1"/>
+          <p:cNvPr id="6" name="줄 1"/>
           <p:cNvSpPr/>
           <p:nvPr/>
         </p:nvSpPr>
@@ -4723,15 +4930,15 @@
           </a:xfrm>
           <a:prstGeom prst="roundRect">
             <a:avLst>
-              <a:gd name="adj" fmla="val 8000"/>
+              <a:gd name="adj" fmla="val 3000"/>
             </a:avLst>
           </a:prstGeom>
           <a:solidFill>
-            <a:srgbClr val="F9F0F6"/>
+            <a:srgbClr val="FFFFFF"/>
           </a:solidFill>
-          <a:ln w="12700">
+          <a:ln w="9525">
             <a:solidFill>
-              <a:srgbClr val="F0D1E5"/>
+              <a:srgbClr val="F6D5EB"/>
             </a:solidFill>
           </a:ln>
         </p:spPr>
@@ -4745,7 +4952,36 @@
       </p:sp>
       <p:sp>
         <p:nvSpPr>
-          <p:cNvPr id="6" name="번호 1"/>
+          <p:cNvPr id="7" name="위쪽 띠"/>
+          <p:cNvSpPr/>
+          <p:nvPr/>
+        </p:nvSpPr>
+        <p:spPr>
+          <a:xfrm>
+            <a:off x="649224" y="1609344"/>
+            <a:ext cx="10893247" cy="82296"/>
+          </a:xfrm>
+          <a:prstGeom prst="rect">
+            <a:avLst/>
+          </a:prstGeom>
+          <a:solidFill>
+            <a:srgbClr val="D879B8"/>
+          </a:solidFill>
+          <a:ln>
+            <a:noFill/>
+          </a:ln>
+        </p:spPr>
+        <p:txBody>
+          <a:bodyPr rtlCol="0" anchor="ctr"/>
+          <a:lstStyle/>
+          <a:p>
+            <a:pPr algn="ctr"/>
+          </a:p>
+        </p:txBody>
+      </p:sp>
+      <p:sp>
+        <p:nvSpPr>
+          <p:cNvPr id="8" name="번호 1"/>
           <p:cNvSpPr/>
           <p:nvPr/>
         </p:nvSpPr>
@@ -4754,11 +4990,13 @@
             <a:off x="822959" y="1874519"/>
             <a:ext cx="457200" cy="457200"/>
           </a:xfrm>
-          <a:prstGeom prst="ellipse">
-            <a:avLst/>
+          <a:prstGeom prst="roundRect">
+            <a:avLst>
+              <a:gd name="adj" fmla="val 25000"/>
+            </a:avLst>
           </a:prstGeom>
           <a:solidFill>
-            <a:srgbClr val="C15CA0"/>
+            <a:srgbClr val="D879B8"/>
           </a:solidFill>
           <a:ln>
             <a:noFill/>
@@ -4778,7 +5016,7 @@
             <a:r>
               <a:rPr sz="1600" b="1" i="0">
                 <a:solidFill>
-                  <a:srgbClr val="FFFFFF"/>
+                  <a:srgbClr val="26231F"/>
                 </a:solidFill>
               </a:rPr>
               <a:t>1</a:t>
@@ -4788,7 +5026,7 @@
       </p:sp>
       <p:sp>
         <p:nvSpPr>
-          <p:cNvPr id="7" name="TextBox 6"/>
+          <p:cNvPr id="9" name="TextBox 8"/>
           <p:cNvSpPr txBox="1"/>
           <p:nvPr/>
         </p:nvSpPr>
@@ -4816,7 +5054,7 @@
             <a:r>
               <a:rPr sz="1800" b="1" i="0">
                 <a:solidFill>
-                  <a:srgbClr val="85326A"/>
+                  <a:srgbClr val="49273E"/>
                 </a:solidFill>
               </a:rPr>
               <a:t>약속 1</a:t>
@@ -4826,7 +5064,7 @@
       </p:sp>
       <p:sp>
         <p:nvSpPr>
-          <p:cNvPr id="8" name="TextBox 7"/>
+          <p:cNvPr id="10" name="TextBox 9"/>
           <p:cNvSpPr txBox="1"/>
           <p:nvPr/>
         </p:nvSpPr>
@@ -4854,7 +5092,7 @@
             <a:r>
               <a:rPr sz="1700" b="0" i="0">
                 <a:solidFill>
-                  <a:srgbClr val="2B2B2B"/>
+                  <a:srgbClr val="26231F"/>
                 </a:solidFill>
               </a:rPr>
               <a:t>하루에 한 번 서로 안아 주기</a:t>
@@ -4864,7 +5102,7 @@
       </p:sp>
       <p:sp>
         <p:nvSpPr>
-          <p:cNvPr id="9" name="줄 2"/>
+          <p:cNvPr id="11" name="줄 2"/>
           <p:cNvSpPr/>
           <p:nvPr/>
         </p:nvSpPr>
@@ -4875,15 +5113,15 @@
           </a:xfrm>
           <a:prstGeom prst="roundRect">
             <a:avLst>
-              <a:gd name="adj" fmla="val 8000"/>
+              <a:gd name="adj" fmla="val 3000"/>
             </a:avLst>
           </a:prstGeom>
           <a:solidFill>
-            <a:srgbClr val="F9F0F6"/>
+            <a:srgbClr val="FFFFFF"/>
           </a:solidFill>
-          <a:ln w="12700">
+          <a:ln w="9525">
             <a:solidFill>
-              <a:srgbClr val="F0D1E5"/>
+              <a:srgbClr val="F6D5EB"/>
             </a:solidFill>
           </a:ln>
         </p:spPr>
@@ -4897,7 +5135,36 @@
       </p:sp>
       <p:sp>
         <p:nvSpPr>
-          <p:cNvPr id="10" name="번호 2"/>
+          <p:cNvPr id="12" name="위쪽 띠"/>
+          <p:cNvSpPr/>
+          <p:nvPr/>
+        </p:nvSpPr>
+        <p:spPr>
+          <a:xfrm>
+            <a:off x="649224" y="2752344"/>
+            <a:ext cx="10893247" cy="82296"/>
+          </a:xfrm>
+          <a:prstGeom prst="rect">
+            <a:avLst/>
+          </a:prstGeom>
+          <a:solidFill>
+            <a:srgbClr val="D879B8"/>
+          </a:solidFill>
+          <a:ln>
+            <a:noFill/>
+          </a:ln>
+        </p:spPr>
+        <p:txBody>
+          <a:bodyPr rtlCol="0" anchor="ctr"/>
+          <a:lstStyle/>
+          <a:p>
+            <a:pPr algn="ctr"/>
+          </a:p>
+        </p:txBody>
+      </p:sp>
+      <p:sp>
+        <p:nvSpPr>
+          <p:cNvPr id="13" name="번호 2"/>
           <p:cNvSpPr/>
           <p:nvPr/>
         </p:nvSpPr>
@@ -4906,11 +5173,13 @@
             <a:off x="822959" y="3017520"/>
             <a:ext cx="457200" cy="457200"/>
           </a:xfrm>
-          <a:prstGeom prst="ellipse">
-            <a:avLst/>
+          <a:prstGeom prst="roundRect">
+            <a:avLst>
+              <a:gd name="adj" fmla="val 25000"/>
+            </a:avLst>
           </a:prstGeom>
           <a:solidFill>
-            <a:srgbClr val="C15CA0"/>
+            <a:srgbClr val="D879B8"/>
           </a:solidFill>
           <a:ln>
             <a:noFill/>
@@ -4930,7 +5199,7 @@
             <a:r>
               <a:rPr sz="1600" b="1" i="0">
                 <a:solidFill>
-                  <a:srgbClr val="FFFFFF"/>
+                  <a:srgbClr val="26231F"/>
                 </a:solidFill>
               </a:rPr>
               <a:t>2</a:t>
@@ -4940,7 +5209,7 @@
       </p:sp>
       <p:sp>
         <p:nvSpPr>
-          <p:cNvPr id="11" name="TextBox 10"/>
+          <p:cNvPr id="14" name="TextBox 13"/>
           <p:cNvSpPr txBox="1"/>
           <p:nvPr/>
         </p:nvSpPr>
@@ -4968,7 +5237,7 @@
             <a:r>
               <a:rPr sz="1800" b="1" i="0">
                 <a:solidFill>
-                  <a:srgbClr val="85326A"/>
+                  <a:srgbClr val="49273E"/>
                 </a:solidFill>
               </a:rPr>
               <a:t>약속 2</a:t>
@@ -4978,7 +5247,7 @@
       </p:sp>
       <p:sp>
         <p:nvSpPr>
-          <p:cNvPr id="12" name="TextBox 11"/>
+          <p:cNvPr id="15" name="TextBox 14"/>
           <p:cNvSpPr txBox="1"/>
           <p:nvPr/>
         </p:nvSpPr>
@@ -5006,7 +5275,7 @@
             <a:r>
               <a:rPr sz="1700" b="0" i="0">
                 <a:solidFill>
-                  <a:srgbClr val="2B2B2B"/>
+                  <a:srgbClr val="26231F"/>
                 </a:solidFill>
               </a:rPr>
               <a:t>화가 나도 잠자리 전엔 풀기</a:t>
@@ -5016,7 +5285,7 @@
       </p:sp>
       <p:sp>
         <p:nvSpPr>
-          <p:cNvPr id="13" name="줄 3"/>
+          <p:cNvPr id="16" name="줄 3"/>
           <p:cNvSpPr/>
           <p:nvPr/>
         </p:nvSpPr>
@@ -5027,15 +5296,15 @@
           </a:xfrm>
           <a:prstGeom prst="roundRect">
             <a:avLst>
-              <a:gd name="adj" fmla="val 8000"/>
+              <a:gd name="adj" fmla="val 3000"/>
             </a:avLst>
           </a:prstGeom>
           <a:solidFill>
-            <a:srgbClr val="F9F0F6"/>
+            <a:srgbClr val="FFFFFF"/>
           </a:solidFill>
-          <a:ln w="12700">
+          <a:ln w="9525">
             <a:solidFill>
-              <a:srgbClr val="F0D1E5"/>
+              <a:srgbClr val="F6D5EB"/>
             </a:solidFill>
           </a:ln>
         </p:spPr>
@@ -5049,7 +5318,36 @@
       </p:sp>
       <p:sp>
         <p:nvSpPr>
-          <p:cNvPr id="14" name="번호 3"/>
+          <p:cNvPr id="17" name="위쪽 띠"/>
+          <p:cNvSpPr/>
+          <p:nvPr/>
+        </p:nvSpPr>
+        <p:spPr>
+          <a:xfrm>
+            <a:off x="649224" y="3895344"/>
+            <a:ext cx="10893247" cy="82296"/>
+          </a:xfrm>
+          <a:prstGeom prst="rect">
+            <a:avLst/>
+          </a:prstGeom>
+          <a:solidFill>
+            <a:srgbClr val="D879B8"/>
+          </a:solidFill>
+          <a:ln>
+            <a:noFill/>
+          </a:ln>
+        </p:spPr>
+        <p:txBody>
+          <a:bodyPr rtlCol="0" anchor="ctr"/>
+          <a:lstStyle/>
+          <a:p>
+            <a:pPr algn="ctr"/>
+          </a:p>
+        </p:txBody>
+      </p:sp>
+      <p:sp>
+        <p:nvSpPr>
+          <p:cNvPr id="18" name="번호 3"/>
           <p:cNvSpPr/>
           <p:nvPr/>
         </p:nvSpPr>
@@ -5058,11 +5356,13 @@
             <a:off x="822959" y="4160520"/>
             <a:ext cx="457200" cy="457200"/>
           </a:xfrm>
-          <a:prstGeom prst="ellipse">
-            <a:avLst/>
+          <a:prstGeom prst="roundRect">
+            <a:avLst>
+              <a:gd name="adj" fmla="val 25000"/>
+            </a:avLst>
           </a:prstGeom>
           <a:solidFill>
-            <a:srgbClr val="C15CA0"/>
+            <a:srgbClr val="D879B8"/>
           </a:solidFill>
           <a:ln>
             <a:noFill/>
@@ -5082,7 +5382,7 @@
             <a:r>
               <a:rPr sz="1600" b="1" i="0">
                 <a:solidFill>
-                  <a:srgbClr val="FFFFFF"/>
+                  <a:srgbClr val="26231F"/>
                 </a:solidFill>
               </a:rPr>
               <a:t>3</a:t>
@@ -5092,7 +5392,7 @@
       </p:sp>
       <p:sp>
         <p:nvSpPr>
-          <p:cNvPr id="15" name="TextBox 14"/>
+          <p:cNvPr id="19" name="TextBox 18"/>
           <p:cNvSpPr txBox="1"/>
           <p:nvPr/>
         </p:nvSpPr>
@@ -5120,7 +5420,7 @@
             <a:r>
               <a:rPr sz="1800" b="1" i="0">
                 <a:solidFill>
-                  <a:srgbClr val="85326A"/>
+                  <a:srgbClr val="49273E"/>
                 </a:solidFill>
               </a:rPr>
               <a:t>약속 3</a:t>
@@ -5130,7 +5430,7 @@
       </p:sp>
       <p:sp>
         <p:nvSpPr>
-          <p:cNvPr id="16" name="TextBox 15"/>
+          <p:cNvPr id="20" name="TextBox 19"/>
           <p:cNvSpPr txBox="1"/>
           <p:nvPr/>
         </p:nvSpPr>
@@ -5158,7 +5458,7 @@
             <a:r>
               <a:rPr sz="1700" b="0" i="0">
                 <a:solidFill>
-                  <a:srgbClr val="2B2B2B"/>
+                  <a:srgbClr val="26231F"/>
                 </a:solidFill>
               </a:rPr>
               <a:t>한 달에 한 번 데이트하기</a:t>
@@ -5180,7 +5480,7 @@
     <p:bg>
       <p:bgPr>
         <a:solidFill>
-          <a:srgbClr val="F9F0F6"/>
+          <a:srgbClr val="FBECF6"/>
         </a:solidFill>
         <a:effectLst/>
       </p:bgPr>
@@ -5200,14 +5500,14 @@
         </p:nvSpPr>
         <p:spPr>
           <a:xfrm>
-            <a:off x="0" y="6035040"/>
-            <a:ext cx="1737360" cy="822960"/>
-          </a:xfrm>
-          <a:prstGeom prst="rtTriangle">
+            <a:off x="640080" y="6400800"/>
+            <a:ext cx="10911535" cy="10972"/>
+          </a:xfrm>
+          <a:prstGeom prst="rect">
             <a:avLst/>
           </a:prstGeom>
           <a:solidFill>
-            <a:srgbClr val="F0D1E5"/>
+            <a:srgbClr val="26231F"/>
           </a:solidFill>
           <a:ln>
             <a:noFill/>
@@ -5223,20 +5523,58 @@
       </p:sp>
       <p:sp>
         <p:nvSpPr>
-          <p:cNvPr id="4" name="장식"/>
+          <p:cNvPr id="4" name="하단 라벨"/>
+          <p:cNvSpPr txBox="1"/>
+          <p:nvPr/>
+        </p:nvSpPr>
+        <p:spPr>
+          <a:xfrm>
+            <a:off x="640080" y="6437376"/>
+            <a:ext cx="5486400" cy="274320"/>
+          </a:xfrm>
+          <a:prstGeom prst="rect">
+            <a:avLst/>
+          </a:prstGeom>
+          <a:noFill/>
+        </p:spPr>
+        <p:txBody>
+          <a:bodyPr wrap="square" lIns="54864" rIns="54864" tIns="27432" bIns="27432" anchor="ctr">
+            <a:noAutofit/>
+          </a:bodyPr>
+          <a:lstStyle/>
+          <a:p>
+            <a:pPr algn="l">
+              <a:lnSpc>
+                <a:spcPct val="115000"/>
+              </a:lnSpc>
+            </a:pPr>
+            <a:r>
+              <a:rPr sz="900" b="1" i="0" spc="250">
+                <a:solidFill>
+                  <a:srgbClr val="26231F"/>
+                </a:solidFill>
+              </a:rPr>
+              <a:t>FAMILY ALBUM</a:t>
+            </a:r>
+          </a:p>
+        </p:txBody>
+      </p:sp>
+      <p:sp>
+        <p:nvSpPr>
+          <p:cNvPr id="5" name="포인트"/>
           <p:cNvSpPr/>
           <p:nvPr/>
         </p:nvSpPr>
         <p:spPr>
           <a:xfrm>
-            <a:off x="0" y="6400800"/>
-            <a:ext cx="914400" cy="457200"/>
-          </a:xfrm>
-          <a:prstGeom prst="rtTriangle">
+            <a:off x="11213287" y="6473952"/>
+            <a:ext cx="219456" cy="219456"/>
+          </a:xfrm>
+          <a:prstGeom prst="donut">
             <a:avLst/>
           </a:prstGeom>
           <a:solidFill>
-            <a:srgbClr val="C15CA0"/>
+            <a:srgbClr val="D879B8"/>
           </a:solidFill>
           <a:ln>
             <a:noFill/>
@@ -5262,8 +5600,8 @@
         </p:nvSpPr>
         <p:spPr>
           <a:xfrm>
-            <a:off x="640080" y="457200"/>
-            <a:ext cx="9722815" cy="868680"/>
+            <a:off x="640080" y="502920"/>
+            <a:ext cx="10911535" cy="914400"/>
           </a:xfrm>
         </p:spPr>
         <p:txBody>
@@ -5280,7 +5618,7 @@
             <a:r>
               <a:rPr sz="3000" b="1" i="0">
                 <a:solidFill>
-                  <a:srgbClr val="85326A"/>
+                  <a:srgbClr val="26231F"/>
                 </a:solidFill>
               </a:rPr>
               <a:t>가족 사진</a:t>
@@ -5290,14 +5628,14 @@
       </p:sp>
       <p:sp>
         <p:nvSpPr>
-          <p:cNvPr id="5" name="사진 자리"/>
+          <p:cNvPr id="6" name="사진 자리"/>
           <p:cNvSpPr/>
           <p:nvPr/>
         </p:nvSpPr>
         <p:spPr>
           <a:xfrm>
             <a:off x="640080" y="1600200"/>
-            <a:ext cx="3515258" cy="2308860"/>
+            <a:ext cx="3515258" cy="2194560"/>
           </a:xfrm>
           <a:prstGeom prst="roundRect">
             <a:avLst>
@@ -5305,12 +5643,10 @@
             </a:avLst>
           </a:prstGeom>
           <a:solidFill>
-            <a:srgbClr val="F0D1E5"/>
+            <a:srgbClr val="F6D5EB"/>
           </a:solidFill>
           <a:ln w="19050">
-            <a:solidFill>
-              <a:srgbClr val="C15CA0"/>
-            </a:solidFill>
+            <a:noFill/>
             <a:prstDash val="dash"/>
           </a:ln>
         </p:spPr>
@@ -5328,7 +5664,7 @@
             <a:r>
               <a:rPr sz="1200" b="0" i="0">
                 <a:solidFill>
-                  <a:srgbClr val="85326A"/>
+                  <a:srgbClr val="8E8780"/>
                 </a:solidFill>
               </a:rPr>
               <a:t>사진 1</a:t>
@@ -5338,14 +5674,14 @@
       </p:sp>
       <p:sp>
         <p:nvSpPr>
-          <p:cNvPr id="6" name="사진 자리"/>
+          <p:cNvPr id="7" name="사진 자리"/>
           <p:cNvSpPr/>
           <p:nvPr/>
         </p:nvSpPr>
         <p:spPr>
           <a:xfrm>
             <a:off x="4338218" y="1600200"/>
-            <a:ext cx="3515258" cy="2308860"/>
+            <a:ext cx="3515258" cy="2194560"/>
           </a:xfrm>
           <a:prstGeom prst="roundRect">
             <a:avLst>
@@ -5353,12 +5689,10 @@
             </a:avLst>
           </a:prstGeom>
           <a:solidFill>
-            <a:srgbClr val="F0D1E5"/>
+            <a:srgbClr val="F6D5EB"/>
           </a:solidFill>
           <a:ln w="19050">
-            <a:solidFill>
-              <a:srgbClr val="C15CA0"/>
-            </a:solidFill>
+            <a:noFill/>
             <a:prstDash val="dash"/>
           </a:ln>
         </p:spPr>
@@ -5376,7 +5710,7 @@
             <a:r>
               <a:rPr sz="1200" b="0" i="0">
                 <a:solidFill>
-                  <a:srgbClr val="85326A"/>
+                  <a:srgbClr val="8E8780"/>
                 </a:solidFill>
               </a:rPr>
               <a:t>사진 2</a:t>
@@ -5386,14 +5720,14 @@
       </p:sp>
       <p:sp>
         <p:nvSpPr>
-          <p:cNvPr id="7" name="사진 자리"/>
+          <p:cNvPr id="8" name="사진 자리"/>
           <p:cNvSpPr/>
           <p:nvPr/>
         </p:nvSpPr>
         <p:spPr>
           <a:xfrm>
             <a:off x="8036356" y="1600200"/>
-            <a:ext cx="3515258" cy="2308860"/>
+            <a:ext cx="3515258" cy="2194560"/>
           </a:xfrm>
           <a:prstGeom prst="roundRect">
             <a:avLst>
@@ -5401,12 +5735,10 @@
             </a:avLst>
           </a:prstGeom>
           <a:solidFill>
-            <a:srgbClr val="F0D1E5"/>
+            <a:srgbClr val="F6D5EB"/>
           </a:solidFill>
           <a:ln w="19050">
-            <a:solidFill>
-              <a:srgbClr val="C15CA0"/>
-            </a:solidFill>
+            <a:noFill/>
             <a:prstDash val="dash"/>
           </a:ln>
         </p:spPr>
@@ -5424,7 +5756,7 @@
             <a:r>
               <a:rPr sz="1200" b="0" i="0">
                 <a:solidFill>
-                  <a:srgbClr val="85326A"/>
+                  <a:srgbClr val="8E8780"/>
                 </a:solidFill>
               </a:rPr>
               <a:t>사진 3</a:t>
@@ -5434,14 +5766,14 @@
       </p:sp>
       <p:sp>
         <p:nvSpPr>
-          <p:cNvPr id="8" name="사진 자리"/>
+          <p:cNvPr id="9" name="사진 자리"/>
           <p:cNvSpPr/>
           <p:nvPr/>
         </p:nvSpPr>
         <p:spPr>
           <a:xfrm>
-            <a:off x="640080" y="4091939"/>
-            <a:ext cx="3515258" cy="2308860"/>
+            <a:off x="640080" y="3977639"/>
+            <a:ext cx="3515258" cy="2194560"/>
           </a:xfrm>
           <a:prstGeom prst="roundRect">
             <a:avLst>
@@ -5449,12 +5781,10 @@
             </a:avLst>
           </a:prstGeom>
           <a:solidFill>
-            <a:srgbClr val="F0D1E5"/>
+            <a:srgbClr val="F6D5EB"/>
           </a:solidFill>
           <a:ln w="19050">
-            <a:solidFill>
-              <a:srgbClr val="C15CA0"/>
-            </a:solidFill>
+            <a:noFill/>
             <a:prstDash val="dash"/>
           </a:ln>
         </p:spPr>
@@ -5472,7 +5802,7 @@
             <a:r>
               <a:rPr sz="1200" b="0" i="0">
                 <a:solidFill>
-                  <a:srgbClr val="85326A"/>
+                  <a:srgbClr val="8E8780"/>
                 </a:solidFill>
               </a:rPr>
               <a:t>사진 4</a:t>
@@ -5482,14 +5812,14 @@
       </p:sp>
       <p:sp>
         <p:nvSpPr>
-          <p:cNvPr id="9" name="사진 자리"/>
+          <p:cNvPr id="10" name="사진 자리"/>
           <p:cNvSpPr/>
           <p:nvPr/>
         </p:nvSpPr>
         <p:spPr>
           <a:xfrm>
-            <a:off x="4338218" y="4091939"/>
-            <a:ext cx="3515258" cy="2308860"/>
+            <a:off x="4338218" y="3977639"/>
+            <a:ext cx="3515258" cy="2194560"/>
           </a:xfrm>
           <a:prstGeom prst="roundRect">
             <a:avLst>
@@ -5497,12 +5827,10 @@
             </a:avLst>
           </a:prstGeom>
           <a:solidFill>
-            <a:srgbClr val="F0D1E5"/>
+            <a:srgbClr val="F6D5EB"/>
           </a:solidFill>
           <a:ln w="19050">
-            <a:solidFill>
-              <a:srgbClr val="C15CA0"/>
-            </a:solidFill>
+            <a:noFill/>
             <a:prstDash val="dash"/>
           </a:ln>
         </p:spPr>
@@ -5520,7 +5848,7 @@
             <a:r>
               <a:rPr sz="1200" b="0" i="0">
                 <a:solidFill>
-                  <a:srgbClr val="85326A"/>
+                  <a:srgbClr val="8E8780"/>
                 </a:solidFill>
               </a:rPr>
               <a:t>사진 5</a:t>
@@ -5530,14 +5858,14 @@
       </p:sp>
       <p:sp>
         <p:nvSpPr>
-          <p:cNvPr id="10" name="사진 자리"/>
+          <p:cNvPr id="11" name="사진 자리"/>
           <p:cNvSpPr/>
           <p:nvPr/>
         </p:nvSpPr>
         <p:spPr>
           <a:xfrm>
-            <a:off x="8036356" y="4091939"/>
-            <a:ext cx="3515258" cy="2308860"/>
+            <a:off x="8036356" y="3977639"/>
+            <a:ext cx="3515258" cy="2194560"/>
           </a:xfrm>
           <a:prstGeom prst="roundRect">
             <a:avLst>
@@ -5545,12 +5873,10 @@
             </a:avLst>
           </a:prstGeom>
           <a:solidFill>
-            <a:srgbClr val="F0D1E5"/>
+            <a:srgbClr val="F6D5EB"/>
           </a:solidFill>
           <a:ln w="19050">
-            <a:solidFill>
-              <a:srgbClr val="C15CA0"/>
-            </a:solidFill>
+            <a:noFill/>
             <a:prstDash val="dash"/>
           </a:ln>
         </p:spPr>
@@ -5568,7 +5894,7 @@
             <a:r>
               <a:rPr sz="1200" b="0" i="0">
                 <a:solidFill>
-                  <a:srgbClr val="85326A"/>
+                  <a:srgbClr val="8E8780"/>
                 </a:solidFill>
               </a:rPr>
               <a:t>사진 6</a:t>
@@ -5587,6 +5913,14 @@
 <file path=ppt/slides/slide6.xml><?xml version="1.0" encoding="utf-8"?>
 <p:sld xmlns:a="http://schemas.openxmlformats.org/drawingml/2006/main" xmlns:p="http://schemas.openxmlformats.org/presentationml/2006/main" xmlns:r="http://schemas.openxmlformats.org/officeDocument/2006/relationships">
   <p:cSld>
+    <p:bg>
+      <p:bgPr>
+        <a:solidFill>
+          <a:srgbClr val="FBECF6"/>
+        </a:solidFill>
+        <a:effectLst/>
+      </p:bgPr>
+    </p:bg>
     <p:spTree>
       <p:nvGrpSpPr>
         <p:cNvPr id="1" name=""/>
@@ -5594,30 +5928,119 @@
         <p:nvPr/>
       </p:nvGrpSpPr>
       <p:grpSpPr/>
-      <p:pic>
-        <p:nvPicPr>
-          <p:cNvPr id="3" name="표지 그림" descr="family-26.jpg"/>
-          <p:cNvPicPr>
-            <a:picLocks noChangeAspect="1"/>
-          </p:cNvPicPr>
-          <p:nvPr/>
-        </p:nvPicPr>
-        <p:blipFill>
-          <a:blip r:embed="rId2"/>
-          <a:stretch>
-            <a:fillRect/>
-          </a:stretch>
-        </p:blipFill>
-        <p:spPr>
-          <a:xfrm>
-            <a:off x="0" y="0"/>
-            <a:ext cx="12191695" cy="6858000"/>
+      <p:sp>
+        <p:nvSpPr>
+          <p:cNvPr id="3" name="사진 자리"/>
+          <p:cNvSpPr/>
+          <p:nvPr/>
+        </p:nvSpPr>
+        <p:spPr>
+          <a:xfrm>
+            <a:off x="7558851" y="685800"/>
+            <a:ext cx="3169840" cy="5486400"/>
+          </a:xfrm>
+          <a:prstGeom prst="round2SameRect">
+            <a:avLst>
+              <a:gd name="adj1" fmla="val 50000"/>
+              <a:gd name="adj2" fmla="val 0"/>
+            </a:avLst>
+          </a:prstGeom>
+          <a:solidFill>
+            <a:srgbClr val="EBADD6"/>
+          </a:solidFill>
+          <a:ln>
+            <a:noFill/>
+          </a:ln>
+        </p:spPr>
+        <p:txBody>
+          <a:bodyPr rtlCol="0" anchor="ctr" wrap="square" lIns="54864" rIns="54864" tIns="27432" bIns="27432">
+            <a:noAutofit/>
+          </a:bodyPr>
+          <a:lstStyle/>
+          <a:p>
+            <a:pPr algn="ctr">
+              <a:lnSpc>
+                <a:spcPct val="100000"/>
+              </a:lnSpc>
+            </a:pPr>
+            <a:r>
+              <a:rPr sz="1400" b="0" i="0">
+                <a:solidFill>
+                  <a:srgbClr val="49273E"/>
+                </a:solidFill>
+              </a:rPr>
+              <a:t>사진을 넣어 주세요</a:t>
+            </a:r>
+          </a:p>
+        </p:txBody>
+      </p:sp>
+      <p:sp>
+        <p:nvSpPr>
+          <p:cNvPr id="4" name="장식"/>
+          <p:cNvSpPr/>
+          <p:nvPr/>
+        </p:nvSpPr>
+        <p:spPr>
+          <a:xfrm>
+            <a:off x="6827349" y="4251960"/>
+            <a:ext cx="1005840" cy="1005840"/>
+          </a:xfrm>
+          <a:prstGeom prst="ellipse">
+            <a:avLst/>
+          </a:prstGeom>
+          <a:solidFill>
+            <a:srgbClr val="EBADD6"/>
+          </a:solidFill>
+          <a:ln>
+            <a:noFill/>
+          </a:ln>
+        </p:spPr>
+        <p:txBody>
+          <a:bodyPr rtlCol="0" anchor="ctr"/>
+          <a:lstStyle/>
+          <a:p>
+            <a:pPr algn="ctr"/>
+          </a:p>
+        </p:txBody>
+      </p:sp>
+      <p:sp>
+        <p:nvSpPr>
+          <p:cNvPr id="5" name="라벨"/>
+          <p:cNvSpPr txBox="1"/>
+          <p:nvPr/>
+        </p:nvSpPr>
+        <p:spPr>
+          <a:xfrm>
+            <a:off x="822960" y="2148840"/>
+            <a:ext cx="5608179" cy="274320"/>
           </a:xfrm>
           <a:prstGeom prst="rect">
             <a:avLst/>
           </a:prstGeom>
-        </p:spPr>
-      </p:pic>
+          <a:noFill/>
+        </p:spPr>
+        <p:txBody>
+          <a:bodyPr wrap="square" lIns="54864" rIns="54864" tIns="27432" bIns="27432" anchor="t">
+            <a:noAutofit/>
+          </a:bodyPr>
+          <a:lstStyle/>
+          <a:p>
+            <a:pPr algn="l">
+              <a:lnSpc>
+                <a:spcPct val="115000"/>
+              </a:lnSpc>
+            </a:pPr>
+            <a:r>
+              <a:rPr sz="1000" b="1" i="0" spc="250">
+                <a:solidFill>
+                  <a:srgbClr val="26231F"/>
+                </a:solidFill>
+              </a:rPr>
+              <a:t>FAMILY ALBUM</a:t>
+            </a:r>
+          </a:p>
+        </p:txBody>
+      </p:sp>
       <p:sp>
         <p:nvSpPr>
           <p:cNvPr id="2" name="Title 1"/>
@@ -5630,8 +6053,8 @@
         </p:nvSpPr>
         <p:spPr>
           <a:xfrm>
-            <a:off x="853418" y="2057400"/>
-            <a:ext cx="6095847" cy="1554480"/>
+            <a:off x="822960" y="2606040"/>
+            <a:ext cx="5608179" cy="1188720"/>
           </a:xfrm>
         </p:spPr>
         <p:txBody>
@@ -5646,9 +6069,9 @@
               </a:lnSpc>
             </a:pPr>
             <a:r>
-              <a:rPr sz="3600" b="1" i="0">
-                <a:solidFill>
-                  <a:srgbClr val="85326A"/>
+              <a:rPr sz="4000" b="1" i="0">
+                <a:solidFill>
+                  <a:srgbClr val="26231F"/>
                 </a:solidFill>
               </a:rPr>
               <a:t>우리 가족 소개를 마칩니다</a:t>
@@ -5658,14 +6081,14 @@
       </p:sp>
       <p:sp>
         <p:nvSpPr>
-          <p:cNvPr id="4" name="한 줄 문구"/>
+          <p:cNvPr id="6" name="한 줄 문구"/>
           <p:cNvSpPr txBox="1"/>
           <p:nvPr/>
         </p:nvSpPr>
         <p:spPr>
           <a:xfrm>
-            <a:off x="853418" y="3749039"/>
-            <a:ext cx="6095847" cy="822960"/>
+            <a:off x="822960" y="3886200"/>
+            <a:ext cx="5608179" cy="822960"/>
           </a:xfrm>
           <a:prstGeom prst="rect">
             <a:avLst/>
@@ -5684,9 +6107,9 @@
               </a:lnSpc>
             </a:pPr>
             <a:r>
-              <a:rPr sz="1700" b="0" i="1">
-                <a:solidFill>
-                  <a:srgbClr val="85326A"/>
+              <a:rPr sz="1700" b="0" i="0">
+                <a:solidFill>
+                  <a:srgbClr val="26231F"/>
                 </a:solidFill>
               </a:rPr>
               <a:t>읽어 주셔서 고맙습니다</a:t>
@@ -5696,14 +6119,14 @@
       </p:sp>
       <p:sp>
         <p:nvSpPr>
-          <p:cNvPr id="5" name="안내 문구"/>
+          <p:cNvPr id="7" name="안내 문구"/>
           <p:cNvSpPr txBox="1"/>
           <p:nvPr/>
         </p:nvSpPr>
         <p:spPr>
           <a:xfrm>
-            <a:off x="853418" y="4617720"/>
-            <a:ext cx="6095847" cy="914400"/>
+            <a:off x="822960" y="4754880"/>
+            <a:ext cx="5608179" cy="914400"/>
           </a:xfrm>
           <a:prstGeom prst="rect">
             <a:avLst/>
@@ -5724,7 +6147,7 @@
             <a:r>
               <a:rPr sz="1400" b="0" i="0">
                 <a:solidFill>
-                  <a:srgbClr val="666666"/>
+                  <a:srgbClr val="26231F"/>
                 </a:solidFill>
               </a:rPr>
               <a:t>고맙습니다 · 가족 이름</a:t>
@@ -5751,34 +6174,34 @@
         <a:sysClr val="window" lastClr="FFFFFF"/>
       </a:lt1>
       <a:dk2>
-        <a:srgbClr val="85326A"/>
+        <a:srgbClr val="49273E"/>
       </a:dk2>
       <a:lt2>
-        <a:srgbClr val="F9F0F6"/>
+        <a:srgbClr val="FBECF6"/>
       </a:lt2>
       <a:accent1>
-        <a:srgbClr val="C15CA0"/>
+        <a:srgbClr val="D879B8"/>
       </a:accent1>
       <a:accent2>
-        <a:srgbClr val="49913B"/>
+        <a:srgbClr val="E198A7"/>
       </a:accent2>
       <a:accent3>
-        <a:srgbClr val="85326A"/>
+        <a:srgbClr val="49273E"/>
       </a:accent3>
       <a:accent4>
-        <a:srgbClr val="F0D1E5"/>
+        <a:srgbClr val="F6D5EB"/>
       </a:accent4>
       <a:accent5>
-        <a:srgbClr val="85766E"/>
+        <a:srgbClr val="DC88B0"/>
       </a:accent5>
       <a:accent6>
-        <a:srgbClr val="B684A6"/>
+        <a:srgbClr val="927D8B"/>
       </a:accent6>
       <a:hlink>
-        <a:srgbClr val="C15CA0"/>
+        <a:srgbClr val="D879B8"/>
       </a:hlink>
       <a:folHlink>
-        <a:srgbClr val="85326A"/>
+        <a:srgbClr val="49273E"/>
       </a:folHlink>
     </a:clrScheme>
     <a:fontScheme name="Office">
